--- a/generated/Tier 1 Broker Scorecards/Saint George Insurance Brokerage, Inc._Broker_Scorecard.pptx
+++ b/generated/Tier 1 Broker Scorecards/Saint George Insurance Brokerage, Inc._Broker_Scorecard.pptx
@@ -3357,7 +3357,7 @@
                         <a:rPr sz="800">
                           <a:latin typeface="Segoe UI"/>
                         </a:rPr>
-                        <a:t>$1,098,549.85 / $947,826.57 / $145,038.88</a:t>
+                        <a:t>$1,098,549.85 / $948,670.56 / $145,882.87</a:t>
                       </a:r>
                     </a:p>
                   </a:txBody>
@@ -3394,7 +3394,7 @@
                         <a:rPr sz="900">
                           <a:latin typeface="Segoe UI"/>
                         </a:rPr>
-                        <a:t>Tier 1  |  3.24% / 15.00%</a:t>
+                        <a:t>Tier 1  |  3.68% / 15.00%</a:t>
                       </a:r>
                     </a:p>
                   </a:txBody>
@@ -3431,7 +3431,7 @@
                         <a:rPr sz="900">
                           <a:latin typeface="Segoe UI"/>
                         </a:rPr>
-                        <a:t>$1,537,969.79  (9.4% achieved)</a:t>
+                        <a:t>$1,537,969.79  (9.5% achieved)</a:t>
                       </a:r>
                     </a:p>
                   </a:txBody>
@@ -3653,7 +3653,7 @@
                         <a:rPr sz="900">
                           <a:latin typeface="Segoe UI"/>
                         </a:rPr>
-                        <a:t>Fleet Subs: 30  |  Binds: 3</a:t>
+                        <a:t>Fleet Subs: 31  |  Binds: 3</a:t>
                       </a:r>
                     </a:p>
                   </a:txBody>
@@ -3690,7 +3690,7 @@
                         <a:rPr sz="900">
                           <a:latin typeface="Segoe UI"/>
                         </a:rPr>
-                        <a:t>Fleet Bound Premium: $120,789.05</a:t>
+                        <a:t>Fleet Bound Premium: $111,958.23</a:t>
                       </a:r>
                     </a:p>
                   </a:txBody>
@@ -3727,7 +3727,7 @@
                         <a:rPr sz="900">
                           <a:latin typeface="Segoe UI"/>
                         </a:rPr>
-                        <a:t>Fleet Book %: 83.3%</a:t>
+                        <a:t>Fleet Book %: 76.7%</a:t>
                       </a:r>
                     </a:p>
                   </a:txBody>
@@ -3766,7 +3766,7 @@
                         <a:rPr sz="900">
                           <a:latin typeface="Segoe UI"/>
                         </a:rPr>
-                        <a:t>Non-Fleet Subs: 155  |  Binds: 3</a:t>
+                        <a:t>Non-Fleet Subs: 159  |  Binds: 4</a:t>
                       </a:r>
                     </a:p>
                   </a:txBody>
@@ -3803,7 +3803,7 @@
                         <a:rPr sz="900">
                           <a:latin typeface="Segoe UI"/>
                         </a:rPr>
-                        <a:t>Non-Fleet Bound Premium: $24,249.83</a:t>
+                        <a:t>Non-Fleet Bound Premium: $33,924.64</a:t>
                       </a:r>
                     </a:p>
                   </a:txBody>
@@ -3840,7 +3840,7 @@
                         <a:rPr sz="900">
                           <a:latin typeface="Segoe UI"/>
                         </a:rPr>
-                        <a:t>Non-Fleet Book %: 16.7%</a:t>
+                        <a:t>Non-Fleet Book %: 23.3%</a:t>
                       </a:r>
                     </a:p>
                   </a:txBody>
@@ -4428,7 +4428,7 @@
                           </a:solidFill>
                           <a:latin typeface="Segoe UI"/>
                         </a:rPr>
-                        <a:t>27</a:t>
+                        <a:t>32</a:t>
                       </a:r>
                     </a:p>
                   </a:txBody>
@@ -4702,9 +4702,12 @@
                       <a:pPr algn="ctr"/>
                       <a:r>
                         <a:rPr sz="800">
+                          <a:solidFill>
+                            <a:srgbClr val="DC2626"/>
+                          </a:solidFill>
                           <a:latin typeface="Segoe UI"/>
                         </a:rPr>
-                        <a:t/>
+                        <a:t>3.1%</a:t>
                       </a:r>
                     </a:p>
                   </a:txBody>
@@ -4975,9 +4978,12 @@
                       <a:pPr algn="ctr"/>
                       <a:r>
                         <a:rPr sz="800">
+                          <a:solidFill>
+                            <a:srgbClr val="DC2626"/>
+                          </a:solidFill>
                           <a:latin typeface="Segoe UI"/>
                         </a:rPr>
-                        <a:t/>
+                        <a:t>1</a:t>
                       </a:r>
                     </a:p>
                   </a:txBody>
@@ -5250,10 +5256,13 @@
                     <a:p>
                       <a:pPr algn="ctr"/>
                       <a:r>
-                        <a:rPr sz="800">
+                        <a:rPr sz="800" b="1">
+                          <a:solidFill>
+                            <a:srgbClr val="DC2626"/>
+                          </a:solidFill>
                           <a:latin typeface="Segoe UI"/>
                         </a:rPr>
-                        <a:t/>
+                        <a:t>$844</a:t>
                       </a:r>
                     </a:p>
                   </a:txBody>

--- a/generated/Tier 1 Broker Scorecards/Saint George Insurance Brokerage, Inc._Broker_Scorecard.pptx
+++ b/generated/Tier 1 Broker Scorecards/Saint George Insurance Brokerage, Inc._Broker_Scorecard.pptx
@@ -3394,7 +3394,7 @@
                         <a:rPr sz="900">
                           <a:latin typeface="Segoe UI"/>
                         </a:rPr>
-                        <a:t>Tier 1  |  3.68% / 15.00%</a:t>
+                        <a:t>Tier 1  |  3.61% / 15.00%</a:t>
                       </a:r>
                     </a:p>
                   </a:txBody>
@@ -3766,7 +3766,7 @@
                         <a:rPr sz="900">
                           <a:latin typeface="Segoe UI"/>
                         </a:rPr>
-                        <a:t>Non-Fleet Subs: 159  |  Binds: 4</a:t>
+                        <a:t>Non-Fleet Subs: 163  |  Binds: 4</a:t>
                       </a:r>
                     </a:p>
                   </a:txBody>
@@ -4428,7 +4428,7 @@
                           </a:solidFill>
                           <a:latin typeface="Segoe UI"/>
                         </a:rPr>
-                        <a:t>32</a:t>
+                        <a:t>36</a:t>
                       </a:r>
                     </a:p>
                   </a:txBody>
@@ -4707,7 +4707,7 @@
                           </a:solidFill>
                           <a:latin typeface="Segoe UI"/>
                         </a:rPr>
-                        <a:t>3.1%</a:t>
+                        <a:t>2.8%</a:t>
                       </a:r>
                     </a:p>
                   </a:txBody>

--- a/generated/Tier 1 Broker Scorecards/Saint George Insurance Brokerage, Inc._Broker_Scorecard.pptx
+++ b/generated/Tier 1 Broker Scorecards/Saint George Insurance Brokerage, Inc._Broker_Scorecard.pptx
@@ -3394,7 +3394,7 @@
                         <a:rPr sz="900">
                           <a:latin typeface="Segoe UI"/>
                         </a:rPr>
-                        <a:t>Tier 1  |  3.61% / 15.00%</a:t>
+                        <a:t>Tier 1  |  3.59% / 15.00%</a:t>
                       </a:r>
                     </a:p>
                   </a:txBody>
@@ -3766,7 +3766,7 @@
                         <a:rPr sz="900">
                           <a:latin typeface="Segoe UI"/>
                         </a:rPr>
-                        <a:t>Non-Fleet Subs: 163  |  Binds: 4</a:t>
+                        <a:t>Non-Fleet Subs: 164  |  Binds: 4</a:t>
                       </a:r>
                     </a:p>
                   </a:txBody>
@@ -4428,7 +4428,7 @@
                           </a:solidFill>
                           <a:latin typeface="Segoe UI"/>
                         </a:rPr>
-                        <a:t>36</a:t>
+                        <a:t>37</a:t>
                       </a:r>
                     </a:p>
                   </a:txBody>
@@ -4707,7 +4707,7 @@
                           </a:solidFill>
                           <a:latin typeface="Segoe UI"/>
                         </a:rPr>
-                        <a:t>2.8%</a:t>
+                        <a:t>2.7%</a:t>
                       </a:r>
                     </a:p>
                   </a:txBody>

--- a/generated/Tier 1 Broker Scorecards/Saint George Insurance Brokerage, Inc._Broker_Scorecard.pptx
+++ b/generated/Tier 1 Broker Scorecards/Saint George Insurance Brokerage, Inc._Broker_Scorecard.pptx
@@ -3394,7 +3394,7 @@
                         <a:rPr sz="900">
                           <a:latin typeface="Segoe UI"/>
                         </a:rPr>
-                        <a:t>Tier 1  |  3.59% / 15.00%</a:t>
+                        <a:t>Tier 1  |  3.08% / 15.00%</a:t>
                       </a:r>
                     </a:p>
                   </a:txBody>
@@ -3690,7 +3690,7 @@
                         <a:rPr sz="900">
                           <a:latin typeface="Segoe UI"/>
                         </a:rPr>
-                        <a:t>Fleet Bound Premium: $111,958.23</a:t>
+                        <a:t>Fleet Bound Premium: $118,153.19</a:t>
                       </a:r>
                     </a:p>
                   </a:txBody>
@@ -3727,7 +3727,7 @@
                         <a:rPr sz="900">
                           <a:latin typeface="Segoe UI"/>
                         </a:rPr>
-                        <a:t>Fleet Book %: 76.7%</a:t>
+                        <a:t>Fleet Book %: 81.0%</a:t>
                       </a:r>
                     </a:p>
                   </a:txBody>
@@ -3766,7 +3766,7 @@
                         <a:rPr sz="900">
                           <a:latin typeface="Segoe UI"/>
                         </a:rPr>
-                        <a:t>Non-Fleet Subs: 164  |  Binds: 4</a:t>
+                        <a:t>Non-Fleet Subs: 164  |  Binds: 3</a:t>
                       </a:r>
                     </a:p>
                   </a:txBody>
@@ -3803,7 +3803,7 @@
                         <a:rPr sz="900">
                           <a:latin typeface="Segoe UI"/>
                         </a:rPr>
-                        <a:t>Non-Fleet Bound Premium: $33,924.64</a:t>
+                        <a:t>Non-Fleet Bound Premium: $27,729.68</a:t>
                       </a:r>
                     </a:p>
                   </a:txBody>
@@ -3840,7 +3840,7 @@
                         <a:rPr sz="900">
                           <a:latin typeface="Segoe UI"/>
                         </a:rPr>
-                        <a:t>Non-Fleet Book %: 23.3%</a:t>
+                        <a:t>Non-Fleet Book %: 19.0%</a:t>
                       </a:r>
                     </a:p>
                   </a:txBody>
@@ -4428,7 +4428,7 @@
                           </a:solidFill>
                           <a:latin typeface="Segoe UI"/>
                         </a:rPr>
-                        <a:t>37</a:t>
+                        <a:t>38</a:t>
                       </a:r>
                     </a:p>
                   </a:txBody>
@@ -4465,7 +4465,7 @@
                         <a:rPr sz="800">
                           <a:latin typeface="Segoe UI"/>
                         </a:rPr>
-                        <a:t>48</a:t>
+                        <a:t>49</a:t>
                       </a:r>
                     </a:p>
                   </a:txBody>
@@ -4707,7 +4707,7 @@
                           </a:solidFill>
                           <a:latin typeface="Segoe UI"/>
                         </a:rPr>
-                        <a:t>2.7%</a:t>
+                        <a:t>2.6%</a:t>
                       </a:r>
                     </a:p>
                   </a:txBody>
@@ -4747,7 +4747,7 @@
                         <a:rPr sz="800">
                           <a:latin typeface="Segoe UI"/>
                         </a:rPr>
-                        <a:t>10.4%</a:t>
+                        <a:t>12.2%</a:t>
                       </a:r>
                     </a:p>
                   </a:txBody>
@@ -5020,7 +5020,7 @@
                         <a:rPr sz="800">
                           <a:latin typeface="Segoe UI"/>
                         </a:rPr>
-                        <a:t>5</a:t>
+                        <a:t>6</a:t>
                       </a:r>
                     </a:p>
                   </a:txBody>

--- a/generated/Tier 1 Broker Scorecards/Saint George Insurance Brokerage, Inc._Broker_Scorecard.pptx
+++ b/generated/Tier 1 Broker Scorecards/Saint George Insurance Brokerage, Inc._Broker_Scorecard.pptx
@@ -3394,7 +3394,7 @@
                         <a:rPr sz="900">
                           <a:latin typeface="Segoe UI"/>
                         </a:rPr>
-                        <a:t>Tier 1  |  3.08% / 15.00%</a:t>
+                        <a:t>Tier 1  |  3.06% / 15.00%</a:t>
                       </a:r>
                     </a:p>
                   </a:txBody>
@@ -3766,7 +3766,7 @@
                         <a:rPr sz="900">
                           <a:latin typeface="Segoe UI"/>
                         </a:rPr>
-                        <a:t>Non-Fleet Subs: 164  |  Binds: 3</a:t>
+                        <a:t>Non-Fleet Subs: 165  |  Binds: 3</a:t>
                       </a:r>
                     </a:p>
                   </a:txBody>
@@ -4428,7 +4428,7 @@
                           </a:solidFill>
                           <a:latin typeface="Segoe UI"/>
                         </a:rPr>
-                        <a:t>38</a:t>
+                        <a:t>39</a:t>
                       </a:r>
                     </a:p>
                   </a:txBody>

--- a/generated/Tier 1 Broker Scorecards/Saint George Insurance Brokerage, Inc._Broker_Scorecard.pptx
+++ b/generated/Tier 1 Broker Scorecards/Saint George Insurance Brokerage, Inc._Broker_Scorecard.pptx
@@ -4465,7 +4465,7 @@
                         <a:rPr sz="800">
                           <a:latin typeface="Segoe UI"/>
                         </a:rPr>
-                        <a:t>49</a:t>
+                        <a:t>48</a:t>
                       </a:r>
                     </a:p>
                   </a:txBody>
@@ -4747,7 +4747,7 @@
                         <a:rPr sz="800">
                           <a:latin typeface="Segoe UI"/>
                         </a:rPr>
-                        <a:t>12.2%</a:t>
+                        <a:t>10.4%</a:t>
                       </a:r>
                     </a:p>
                   </a:txBody>
@@ -5020,7 +5020,7 @@
                         <a:rPr sz="800">
                           <a:latin typeface="Segoe UI"/>
                         </a:rPr>
-                        <a:t>6</a:t>
+                        <a:t>5</a:t>
                       </a:r>
                     </a:p>
                   </a:txBody>

--- a/generated/Tier 1 Broker Scorecards/Saint George Insurance Brokerage, Inc._Broker_Scorecard.pptx
+++ b/generated/Tier 1 Broker Scorecards/Saint George Insurance Brokerage, Inc._Broker_Scorecard.pptx
@@ -3394,7 +3394,7 @@
                         <a:rPr sz="900">
                           <a:latin typeface="Segoe UI"/>
                         </a:rPr>
-                        <a:t>Tier 1  |  3.06% / 15.00%</a:t>
+                        <a:t>Tier 1  |  3.54% / 15.00%</a:t>
                       </a:r>
                     </a:p>
                   </a:txBody>
@@ -3690,7 +3690,7 @@
                         <a:rPr sz="900">
                           <a:latin typeface="Segoe UI"/>
                         </a:rPr>
-                        <a:t>Fleet Bound Premium: $118,153.19</a:t>
+                        <a:t>Fleet Bound Premium: $111,958.23</a:t>
                       </a:r>
                     </a:p>
                   </a:txBody>
@@ -3727,7 +3727,7 @@
                         <a:rPr sz="900">
                           <a:latin typeface="Segoe UI"/>
                         </a:rPr>
-                        <a:t>Fleet Book %: 81.0%</a:t>
+                        <a:t>Fleet Book %: 76.7%</a:t>
                       </a:r>
                     </a:p>
                   </a:txBody>
@@ -3766,7 +3766,7 @@
                         <a:rPr sz="900">
                           <a:latin typeface="Segoe UI"/>
                         </a:rPr>
-                        <a:t>Non-Fleet Subs: 165  |  Binds: 3</a:t>
+                        <a:t>Non-Fleet Subs: 167  |  Binds: 4</a:t>
                       </a:r>
                     </a:p>
                   </a:txBody>
@@ -3803,7 +3803,7 @@
                         <a:rPr sz="900">
                           <a:latin typeface="Segoe UI"/>
                         </a:rPr>
-                        <a:t>Non-Fleet Bound Premium: $27,729.68</a:t>
+                        <a:t>Non-Fleet Bound Premium: $33,924.64</a:t>
                       </a:r>
                     </a:p>
                   </a:txBody>
@@ -3840,7 +3840,7 @@
                         <a:rPr sz="900">
                           <a:latin typeface="Segoe UI"/>
                         </a:rPr>
-                        <a:t>Non-Fleet Book %: 19.0%</a:t>
+                        <a:t>Non-Fleet Book %: 23.3%</a:t>
                       </a:r>
                     </a:p>
                   </a:txBody>
@@ -4428,7 +4428,7 @@
                           </a:solidFill>
                           <a:latin typeface="Segoe UI"/>
                         </a:rPr>
-                        <a:t>39</a:t>
+                        <a:t>41</a:t>
                       </a:r>
                     </a:p>
                   </a:txBody>
@@ -4465,7 +4465,7 @@
                         <a:rPr sz="800">
                           <a:latin typeface="Segoe UI"/>
                         </a:rPr>
-                        <a:t>48</a:t>
+                        <a:t>49</a:t>
                       </a:r>
                     </a:p>
                   </a:txBody>
@@ -4707,7 +4707,7 @@
                           </a:solidFill>
                           <a:latin typeface="Segoe UI"/>
                         </a:rPr>
-                        <a:t>2.6%</a:t>
+                        <a:t>4.9%</a:t>
                       </a:r>
                     </a:p>
                   </a:txBody>
@@ -4747,7 +4747,7 @@
                         <a:rPr sz="800">
                           <a:latin typeface="Segoe UI"/>
                         </a:rPr>
-                        <a:t>10.4%</a:t>
+                        <a:t>12.2%</a:t>
                       </a:r>
                     </a:p>
                   </a:txBody>
@@ -4983,7 +4983,7 @@
                           </a:solidFill>
                           <a:latin typeface="Segoe UI"/>
                         </a:rPr>
-                        <a:t>1</a:t>
+                        <a:t>2</a:t>
                       </a:r>
                     </a:p>
                   </a:txBody>
@@ -5020,7 +5020,7 @@
                         <a:rPr sz="800">
                           <a:latin typeface="Segoe UI"/>
                         </a:rPr>
-                        <a:t>5</a:t>
+                        <a:t>6</a:t>
                       </a:r>
                     </a:p>
                   </a:txBody>

--- a/generated/Tier 1 Broker Scorecards/Saint George Insurance Brokerage, Inc._Broker_Scorecard.pptx
+++ b/generated/Tier 1 Broker Scorecards/Saint George Insurance Brokerage, Inc._Broker_Scorecard.pptx
@@ -3357,7 +3357,7 @@
                         <a:rPr sz="800">
                           <a:latin typeface="Segoe UI"/>
                         </a:rPr>
-                        <a:t>$1,098,549.85 / $948,670.56 / $145,882.87</a:t>
+                        <a:t>$1,098,549.85 / $948,619.69 / $145,832.00</a:t>
                       </a:r>
                     </a:p>
                   </a:txBody>
@@ -3394,7 +3394,7 @@
                         <a:rPr sz="900">
                           <a:latin typeface="Segoe UI"/>
                         </a:rPr>
-                        <a:t>Tier 1  |  3.54% / 15.00%</a:t>
+                        <a:t>Tier 1  |  3.52% / 15.00%</a:t>
                       </a:r>
                     </a:p>
                   </a:txBody>
@@ -3690,7 +3690,7 @@
                         <a:rPr sz="900">
                           <a:latin typeface="Segoe UI"/>
                         </a:rPr>
-                        <a:t>Fleet Bound Premium: $111,958.23</a:t>
+                        <a:t>Fleet Bound Premium: $111,860.87</a:t>
                       </a:r>
                     </a:p>
                   </a:txBody>
@@ -3766,7 +3766,7 @@
                         <a:rPr sz="900">
                           <a:latin typeface="Segoe UI"/>
                         </a:rPr>
-                        <a:t>Non-Fleet Subs: 167  |  Binds: 4</a:t>
+                        <a:t>Non-Fleet Subs: 168  |  Binds: 4</a:t>
                       </a:r>
                     </a:p>
                   </a:txBody>
@@ -3803,7 +3803,7 @@
                         <a:rPr sz="900">
                           <a:latin typeface="Segoe UI"/>
                         </a:rPr>
-                        <a:t>Non-Fleet Bound Premium: $33,924.64</a:t>
+                        <a:t>Non-Fleet Bound Premium: $33,971.13</a:t>
                       </a:r>
                     </a:p>
                   </a:txBody>
@@ -4428,7 +4428,7 @@
                           </a:solidFill>
                           <a:latin typeface="Segoe UI"/>
                         </a:rPr>
-                        <a:t>41</a:t>
+                        <a:t>44</a:t>
                       </a:r>
                     </a:p>
                   </a:txBody>
@@ -4465,7 +4465,7 @@
                         <a:rPr sz="800">
                           <a:latin typeface="Segoe UI"/>
                         </a:rPr>
-                        <a:t>49</a:t>
+                        <a:t>48</a:t>
                       </a:r>
                     </a:p>
                   </a:txBody>
@@ -4624,7 +4624,7 @@
                           </a:solidFill>
                           <a:latin typeface="Segoe UI"/>
                         </a:rPr>
-                        <a:t>9.2%</a:t>
+                        <a:t>7.7%</a:t>
                       </a:r>
                     </a:p>
                   </a:txBody>
@@ -4707,7 +4707,7 @@
                           </a:solidFill>
                           <a:latin typeface="Segoe UI"/>
                         </a:rPr>
-                        <a:t>4.9%</a:t>
+                        <a:t>6.8%</a:t>
                       </a:r>
                     </a:p>
                   </a:txBody>
@@ -4747,7 +4747,7 @@
                         <a:rPr sz="800">
                           <a:latin typeface="Segoe UI"/>
                         </a:rPr>
-                        <a:t>12.2%</a:t>
+                        <a:t>10.4%</a:t>
                       </a:r>
                     </a:p>
                   </a:txBody>
@@ -4901,12 +4901,9 @@
                       <a:pPr algn="ctr"/>
                       <a:r>
                         <a:rPr sz="800">
-                          <a:solidFill>
-                            <a:srgbClr val="059669"/>
-                          </a:solidFill>
                           <a:latin typeface="Segoe UI"/>
                         </a:rPr>
-                        <a:t>6</a:t>
+                        <a:t>5</a:t>
                       </a:r>
                     </a:p>
                   </a:txBody>
@@ -4978,12 +4975,9 @@
                       <a:pPr algn="ctr"/>
                       <a:r>
                         <a:rPr sz="800">
-                          <a:solidFill>
-                            <a:srgbClr val="DC2626"/>
-                          </a:solidFill>
                           <a:latin typeface="Segoe UI"/>
                         </a:rPr>
-                        <a:t>2</a:t>
+                        <a:t>3</a:t>
                       </a:r>
                     </a:p>
                   </a:txBody>
@@ -5020,7 +5014,7 @@
                         <a:rPr sz="800">
                           <a:latin typeface="Segoe UI"/>
                         </a:rPr>
-                        <a:t>6</a:t>
+                        <a:t>5</a:t>
                       </a:r>
                     </a:p>
                   </a:txBody>
@@ -5262,7 +5256,7 @@
                           </a:solidFill>
                           <a:latin typeface="Segoe UI"/>
                         </a:rPr>
-                        <a:t>$844</a:t>
+                        <a:t>$793</a:t>
                       </a:r>
                     </a:p>
                   </a:txBody>

--- a/generated/Tier 1 Broker Scorecards/Saint George Insurance Brokerage, Inc._Broker_Scorecard.pptx
+++ b/generated/Tier 1 Broker Scorecards/Saint George Insurance Brokerage, Inc._Broker_Scorecard.pptx
@@ -3394,7 +3394,7 @@
                         <a:rPr sz="900">
                           <a:latin typeface="Segoe UI"/>
                         </a:rPr>
-                        <a:t>Tier 1  |  3.52% / 15.00%</a:t>
+                        <a:t>Tier 1  |  3.47% / 15.00%</a:t>
                       </a:r>
                     </a:p>
                   </a:txBody>
@@ -3766,7 +3766,7 @@
                         <a:rPr sz="900">
                           <a:latin typeface="Segoe UI"/>
                         </a:rPr>
-                        <a:t>Non-Fleet Subs: 168  |  Binds: 4</a:t>
+                        <a:t>Non-Fleet Subs: 171  |  Binds: 4</a:t>
                       </a:r>
                     </a:p>
                   </a:txBody>
@@ -4428,7 +4428,7 @@
                           </a:solidFill>
                           <a:latin typeface="Segoe UI"/>
                         </a:rPr>
-                        <a:t>44</a:t>
+                        <a:t>47</a:t>
                       </a:r>
                     </a:p>
                   </a:txBody>
@@ -4707,7 +4707,7 @@
                           </a:solidFill>
                           <a:latin typeface="Segoe UI"/>
                         </a:rPr>
-                        <a:t>6.8%</a:t>
+                        <a:t>6.4%</a:t>
                       </a:r>
                     </a:p>
                   </a:txBody>

--- a/generated/Tier 1 Broker Scorecards/Saint George Insurance Brokerage, Inc._Broker_Scorecard.pptx
+++ b/generated/Tier 1 Broker Scorecards/Saint George Insurance Brokerage, Inc._Broker_Scorecard.pptx
@@ -3394,7 +3394,7 @@
                         <a:rPr sz="900">
                           <a:latin typeface="Segoe UI"/>
                         </a:rPr>
-                        <a:t>Tier 1  |  3.47% / 15.00%</a:t>
+                        <a:t>Tier 1  |  3.45% / 15.00%</a:t>
                       </a:r>
                     </a:p>
                   </a:txBody>
@@ -3766,7 +3766,7 @@
                         <a:rPr sz="900">
                           <a:latin typeface="Segoe UI"/>
                         </a:rPr>
-                        <a:t>Non-Fleet Subs: 171  |  Binds: 4</a:t>
+                        <a:t>Non-Fleet Subs: 172  |  Binds: 4</a:t>
                       </a:r>
                     </a:p>
                   </a:txBody>
@@ -4428,7 +4428,7 @@
                           </a:solidFill>
                           <a:latin typeface="Segoe UI"/>
                         </a:rPr>
-                        <a:t>47</a:t>
+                        <a:t>48</a:t>
                       </a:r>
                     </a:p>
                   </a:txBody>
@@ -4465,7 +4465,7 @@
                         <a:rPr sz="800">
                           <a:latin typeface="Segoe UI"/>
                         </a:rPr>
-                        <a:t>48</a:t>
+                        <a:t>49</a:t>
                       </a:r>
                     </a:p>
                   </a:txBody>
@@ -4707,7 +4707,7 @@
                           </a:solidFill>
                           <a:latin typeface="Segoe UI"/>
                         </a:rPr>
-                        <a:t>6.4%</a:t>
+                        <a:t>6.2%</a:t>
                       </a:r>
                     </a:p>
                   </a:txBody>
@@ -4747,7 +4747,7 @@
                         <a:rPr sz="800">
                           <a:latin typeface="Segoe UI"/>
                         </a:rPr>
-                        <a:t>10.4%</a:t>
+                        <a:t>12.2%</a:t>
                       </a:r>
                     </a:p>
                   </a:txBody>
@@ -5014,7 +5014,7 @@
                         <a:rPr sz="800">
                           <a:latin typeface="Segoe UI"/>
                         </a:rPr>
-                        <a:t>5</a:t>
+                        <a:t>6</a:t>
                       </a:r>
                     </a:p>
                   </a:txBody>

--- a/generated/Tier 1 Broker Scorecards/Saint George Insurance Brokerage, Inc._Broker_Scorecard.pptx
+++ b/generated/Tier 1 Broker Scorecards/Saint George Insurance Brokerage, Inc._Broker_Scorecard.pptx
@@ -3357,7 +3357,7 @@
                         <a:rPr sz="800">
                           <a:latin typeface="Segoe UI"/>
                         </a:rPr>
-                        <a:t>$1,098,549.85 / $948,619.69 / $145,832.00</a:t>
+                        <a:t>$1,098,549.85 / $909,197.78 / $145,832.00</a:t>
                       </a:r>
                     </a:p>
                   </a:txBody>
@@ -4465,7 +4465,7 @@
                         <a:rPr sz="800">
                           <a:latin typeface="Segoe UI"/>
                         </a:rPr>
-                        <a:t>49</a:t>
+                        <a:t>48</a:t>
                       </a:r>
                     </a:p>
                   </a:txBody>
@@ -4747,7 +4747,7 @@
                         <a:rPr sz="800">
                           <a:latin typeface="Segoe UI"/>
                         </a:rPr>
-                        <a:t>12.2%</a:t>
+                        <a:t>10.4%</a:t>
                       </a:r>
                     </a:p>
                   </a:txBody>
@@ -5014,7 +5014,7 @@
                         <a:rPr sz="800">
                           <a:latin typeface="Segoe UI"/>
                         </a:rPr>
-                        <a:t>6</a:t>
+                        <a:t>5</a:t>
                       </a:r>
                     </a:p>
                   </a:txBody>
